--- a/assets/memos/B7-memo.pptx
+++ b/assets/memos/B7-memo.pptx
@@ -3105,8 +3105,8 @@
         </p:nvSpPr>
         <p:spPr>
           <a:xfrm>
-            <a:off x="648000" y="1180800"/>
-            <a:ext cx="5058000" cy="511200"/>
+            <a:off x="532800" y="1180800"/>
+            <a:ext cx="6490800" cy="511200"/>
           </a:xfrm>
           <a:prstGeom prst="rect">
             <a:avLst/>
@@ -3128,7 +3128,7 @@
               </a:spcAft>
             </a:pPr>
             <a:r>
-              <a:rPr sz="2000" b="1" i="0">
+              <a:rPr sz="1800" b="1" i="0">
                 <a:solidFill>
                   <a:srgbClr val="4388BC"/>
                 </a:solidFill>
@@ -4562,8 +4562,8 @@
         </p:nvSpPr>
         <p:spPr>
           <a:xfrm>
-            <a:off x="648000" y="1180800"/>
-            <a:ext cx="5058000" cy="511200"/>
+            <a:off x="532800" y="1180800"/>
+            <a:ext cx="6490800" cy="511200"/>
           </a:xfrm>
           <a:prstGeom prst="rect">
             <a:avLst/>
@@ -4585,7 +4585,7 @@
               </a:spcAft>
             </a:pPr>
             <a:r>
-              <a:rPr sz="2000" b="1" i="0">
+              <a:rPr sz="1800" b="1" i="0">
                 <a:solidFill>
                   <a:srgbClr val="4388BC"/>
                 </a:solidFill>

--- a/assets/memos/B7-memo.pptx
+++ b/assets/memos/B7-memo.pptx
@@ -3153,7 +3153,7 @@
                 </a:solidFill>
                 <a:latin typeface="Arial"/>
               </a:rPr>
-              <a:t>Qu'est-ce que les outils numériques de scolar… | Pourquoi utiliser ces outils numériques ? | Mot de passe oublié sur Educonnect ?</a:t>
+              <a:t>Qu'est-ce que les outils numériques de scolarité ? | Pourquoi utiliser ces outils numériques ? | Mot de passe oublié sur Educonnect ?</a:t>
             </a:r>
           </a:p>
         </p:txBody>
@@ -3360,7 +3360,7 @@
                 </a:solidFill>
                 <a:latin typeface="Arial"/>
               </a:rPr>
-              <a:t>Qu'est-ce que les outils numériques de scolar…</a:t>
+              <a:t>Qu'est-ce que les outils numériques de scolarité ?</a:t>
             </a:r>
           </a:p>
         </p:txBody>
@@ -3402,7 +3402,7 @@
                 </a:solidFill>
                 <a:latin typeface="Arial"/>
               </a:rPr>
-              <a:t>→ Ces plateformes officielles et gratuites vous permettent de suivr…</a:t>
+              <a:t>→ Ces plateformes officielles et gratuites vous permettent de suivre la scolarité de votre enfant, de gérer l'orientation et de communiquer avec l'école — directement depuis chez vous, sur ordinateur ou smartphone.</a:t>
             </a:r>
           </a:p>
           <a:p>
@@ -3421,7 +3421,7 @@
                 </a:solidFill>
                 <a:latin typeface="Arial"/>
               </a:rPr>
-              <a:t>→ Consulter les notes, absences, emploi du temps et cahier de texte…</a:t>
+              <a:t>→ Consulter les notes, absences, emploi du temps et cahier de textes en temps réel.</a:t>
             </a:r>
           </a:p>
           <a:p>
@@ -3459,7 +3459,7 @@
                 </a:solidFill>
                 <a:latin typeface="Arial"/>
               </a:rPr>
-              <a:t>→ Portail de connexion sécurisée qui donne accès à tous les service…</a:t>
+              <a:t>→ Portail de connexion sécurisée qui donne accès à tous les services scolaires numériques.</a:t>
             </a:r>
           </a:p>
         </p:txBody>
@@ -3708,7 +3708,7 @@
                 </a:solidFill>
                 <a:latin typeface="Arial"/>
               </a:rPr>
-              <a:t>→ Ces plateformes offrent des avantages significatifs qui simplifie…</a:t>
+              <a:t>→ Ces plateformes offrent des avantages significatifs qui simplifient le quotidien des familles et améliorent le suivi scolaire.</a:t>
             </a:r>
           </a:p>
           <a:p>
@@ -3746,7 +3746,7 @@
                 </a:solidFill>
                 <a:latin typeface="Arial"/>
               </a:rPr>
-              <a:t>→ Accédez à toutes les informations nécessaires sans vous déplacer,…</a:t>
+              <a:t>→ Accédez à toutes les informations nécessaires sans vous déplacer, depuis le confort de votre foyer.</a:t>
             </a:r>
           </a:p>
           <a:p>
@@ -4014,7 +4014,7 @@
                 </a:solidFill>
                 <a:latin typeface="Arial"/>
               </a:rPr>
-              <a:t>→ Pas de panique ! Voici les étapes simples pour récupérer vos iden…</a:t>
+              <a:t>→ Pas de panique ! Voici les étapes simples pour récupérer vos identifiants et retrouver l'accès à votre compte Educonnect en quelques minutes.</a:t>
             </a:r>
           </a:p>
           <a:p>
@@ -4052,7 +4052,7 @@
                 </a:solidFill>
                 <a:latin typeface="Arial"/>
               </a:rPr>
-              <a:t>→ Rendez-vous sur le site officiel d'Educonnect et repérez le lien …</a:t>
+              <a:t>→ Rendez-vous sur le site officiel d'Educonnect et repérez le lien pour vous connecter.</a:t>
             </a:r>
           </a:p>
           <a:p>
@@ -4320,7 +4320,7 @@
                 </a:solidFill>
                 <a:latin typeface="Arial"/>
               </a:rPr>
-              <a:t>→ Ce guide pas à pas vous montrera comment signaler et justifier un…</a:t>
+              <a:t>→ Ce guide pas à pas vous montrera comment signaler et justifier une absence de votre enfant directement depuis l'application Pronote ou la version web.</a:t>
             </a:r>
           </a:p>
           <a:p>
@@ -4358,7 +4358,7 @@
                 </a:solidFill>
                 <a:latin typeface="Arial"/>
               </a:rPr>
-              <a:t>→ Lancez l'application mobile Pronote sur votre smartphone ou rende…</a:t>
+              <a:t>→ Lancez l'application mobile Pronote sur votre smartphone ou rendez-vous sur le site web depuis votre navigateur.</a:t>
             </a:r>
           </a:p>
           <a:p>
@@ -4610,7 +4610,7 @@
                 </a:solidFill>
                 <a:latin typeface="Arial"/>
               </a:rPr>
-              <a:t>Qu'est-ce que les outils numériques de scolar… | Pourquoi utiliser ces outils numériques ? | Mot de passe oublié sur Educonnect ?</a:t>
+              <a:t>Qu'est-ce que les outils numériques de scolarité ? | Pourquoi utiliser ces outils numériques ? | Mot de passe oublié sur Educonnect ?</a:t>
             </a:r>
           </a:p>
         </p:txBody>
@@ -4859,7 +4859,7 @@
                 </a:solidFill>
                 <a:latin typeface="Arial"/>
               </a:rPr>
-              <a:t>→ Anticipez chaque étape de l'orientation post-bac avec ce calendri…</a:t>
+              <a:t>→ Anticipez chaque étape de l'orientation post-bac avec ce calendrier officiel des moments cruciaux.</a:t>
             </a:r>
           </a:p>
           <a:p>
@@ -4897,7 +4897,7 @@
                 </a:solidFill>
                 <a:latin typeface="Arial"/>
               </a:rPr>
-              <a:t>→ Mi-janvier à début mars : Création de votre dossier et saisie des…</a:t>
+              <a:t>→ Mi-janvier à début mars : Création de votre dossier et saisie des informations personnelles.</a:t>
             </a:r>
           </a:p>
           <a:p>
@@ -5165,7 +5165,7 @@
                 </a:solidFill>
                 <a:latin typeface="Arial"/>
               </a:rPr>
-              <a:t>→ Quelques erreurs courantes peuvent compliquer votre expérience su…</a:t>
+              <a:t>→ Quelques erreurs courantes peuvent compliquer votre expérience sur ces plateformes. Voici les réflexes essentiels à adopter dès maintenant.</a:t>
             </a:r>
           </a:p>
           <a:p>
@@ -5222,7 +5222,7 @@
                 </a:solidFill>
                 <a:latin typeface="Arial"/>
               </a:rPr>
-              <a:t>→ Noter ses identifiants dans un endroit sûr (pas un post-it visibl…</a:t>
+              <a:t>→ Noter ses identifiants dans un endroit sûr (pas un post-it visible !)</a:t>
             </a:r>
           </a:p>
         </p:txBody>

--- a/assets/memos/B7-memo.pptx
+++ b/assets/memos/B7-memo.pptx
@@ -3167,7 +3167,7 @@
         <p:spPr>
           <a:xfrm>
             <a:off x="532800" y="1749600"/>
-            <a:ext cx="6490800" cy="1371600"/>
+            <a:ext cx="6490800" cy="1835999"/>
           </a:xfrm>
           <a:prstGeom prst="rect">
             <a:avLst/>
@@ -3208,7 +3208,7 @@
         <p:spPr>
           <a:xfrm>
             <a:off x="532800" y="1749600"/>
-            <a:ext cx="572400" cy="1371600"/>
+            <a:ext cx="572400" cy="1835999"/>
           </a:xfrm>
           <a:prstGeom prst="rect">
             <a:avLst/>
@@ -3374,7 +3374,7 @@
         <p:spPr>
           <a:xfrm>
             <a:off x="1159200" y="2214000"/>
-            <a:ext cx="5828400" cy="885600"/>
+            <a:ext cx="5828400" cy="1335599"/>
           </a:xfrm>
           <a:prstGeom prst="rect">
             <a:avLst/>
@@ -3472,8 +3472,8 @@
         </p:nvSpPr>
         <p:spPr>
           <a:xfrm>
-            <a:off x="532800" y="3186000"/>
-            <a:ext cx="6490800" cy="1371600"/>
+            <a:off x="532800" y="3650400"/>
+            <a:ext cx="6490800" cy="1533600"/>
           </a:xfrm>
           <a:prstGeom prst="rect">
             <a:avLst/>
@@ -3513,8 +3513,8 @@
         </p:nvSpPr>
         <p:spPr>
           <a:xfrm>
-            <a:off x="532800" y="3186000"/>
-            <a:ext cx="572400" cy="1371600"/>
+            <a:off x="532800" y="3650400"/>
+            <a:ext cx="572400" cy="1533600"/>
           </a:xfrm>
           <a:prstGeom prst="rect">
             <a:avLst/>
@@ -3554,7 +3554,7 @@
         </p:nvSpPr>
         <p:spPr>
           <a:xfrm>
-            <a:off x="1206000" y="3607200"/>
+            <a:off x="1206000" y="4071600"/>
             <a:ext cx="5752800" cy="7200"/>
           </a:xfrm>
           <a:prstGeom prst="rect">
@@ -3595,7 +3595,7 @@
         </p:nvSpPr>
         <p:spPr>
           <a:xfrm>
-            <a:off x="532800" y="3252600"/>
+            <a:off x="532800" y="3717000"/>
             <a:ext cx="572400" cy="288000"/>
           </a:xfrm>
           <a:prstGeom prst="rect">
@@ -3637,7 +3637,7 @@
         </p:nvSpPr>
         <p:spPr>
           <a:xfrm>
-            <a:off x="1177200" y="3221999"/>
+            <a:off x="1177200" y="3686400"/>
             <a:ext cx="5810400" cy="370799"/>
           </a:xfrm>
           <a:prstGeom prst="rect">
@@ -3679,8 +3679,8 @@
         </p:nvSpPr>
         <p:spPr>
           <a:xfrm>
-            <a:off x="1159200" y="3650399"/>
-            <a:ext cx="5828400" cy="885600"/>
+            <a:off x="1159200" y="4114800"/>
+            <a:ext cx="5828400" cy="1033199"/>
           </a:xfrm>
           <a:prstGeom prst="rect">
             <a:avLst/>
@@ -3778,8 +3778,8 @@
         </p:nvSpPr>
         <p:spPr>
           <a:xfrm>
-            <a:off x="532800" y="4622400"/>
-            <a:ext cx="6490800" cy="1371600"/>
+            <a:off x="532800" y="5248800"/>
+            <a:ext cx="6490800" cy="1533600"/>
           </a:xfrm>
           <a:prstGeom prst="rect">
             <a:avLst/>
@@ -3819,8 +3819,8 @@
         </p:nvSpPr>
         <p:spPr>
           <a:xfrm>
-            <a:off x="532800" y="4622400"/>
-            <a:ext cx="572400" cy="1371600"/>
+            <a:off x="532800" y="5248800"/>
+            <a:ext cx="572400" cy="1533600"/>
           </a:xfrm>
           <a:prstGeom prst="rect">
             <a:avLst/>
@@ -3860,7 +3860,7 @@
         </p:nvSpPr>
         <p:spPr>
           <a:xfrm>
-            <a:off x="1206000" y="5043600"/>
+            <a:off x="1206000" y="5670000"/>
             <a:ext cx="5752800" cy="7200"/>
           </a:xfrm>
           <a:prstGeom prst="rect">
@@ -3901,7 +3901,7 @@
         </p:nvSpPr>
         <p:spPr>
           <a:xfrm>
-            <a:off x="532800" y="4689000"/>
+            <a:off x="532800" y="5315400"/>
             <a:ext cx="572400" cy="288000"/>
           </a:xfrm>
           <a:prstGeom prst="rect">
@@ -3943,7 +3943,7 @@
         </p:nvSpPr>
         <p:spPr>
           <a:xfrm>
-            <a:off x="1177200" y="4658400"/>
+            <a:off x="1177200" y="5284800"/>
             <a:ext cx="5810400" cy="370799"/>
           </a:xfrm>
           <a:prstGeom prst="rect">
@@ -3985,8 +3985,8 @@
         </p:nvSpPr>
         <p:spPr>
           <a:xfrm>
-            <a:off x="1159200" y="5086800"/>
-            <a:ext cx="5828400" cy="885600"/>
+            <a:off x="1159200" y="5713200"/>
+            <a:ext cx="5828400" cy="1033199"/>
           </a:xfrm>
           <a:prstGeom prst="rect">
             <a:avLst/>
@@ -4084,8 +4084,8 @@
         </p:nvSpPr>
         <p:spPr>
           <a:xfrm>
-            <a:off x="532800" y="6058799"/>
-            <a:ext cx="6490800" cy="1371600"/>
+            <a:off x="532800" y="6847200"/>
+            <a:ext cx="6490800" cy="1382400"/>
           </a:xfrm>
           <a:prstGeom prst="rect">
             <a:avLst/>
@@ -4125,8 +4125,8 @@
         </p:nvSpPr>
         <p:spPr>
           <a:xfrm>
-            <a:off x="532800" y="6058799"/>
-            <a:ext cx="572400" cy="1371600"/>
+            <a:off x="532800" y="6847200"/>
+            <a:ext cx="572400" cy="1382400"/>
           </a:xfrm>
           <a:prstGeom prst="rect">
             <a:avLst/>
@@ -4166,7 +4166,7 @@
         </p:nvSpPr>
         <p:spPr>
           <a:xfrm>
-            <a:off x="1206000" y="6480000"/>
+            <a:off x="1206000" y="7268399"/>
             <a:ext cx="5752800" cy="7200"/>
           </a:xfrm>
           <a:prstGeom prst="rect">
@@ -4207,7 +4207,7 @@
         </p:nvSpPr>
         <p:spPr>
           <a:xfrm>
-            <a:off x="532800" y="6125399"/>
+            <a:off x="532800" y="6913799"/>
             <a:ext cx="572400" cy="288000"/>
           </a:xfrm>
           <a:prstGeom prst="rect">
@@ -4249,7 +4249,7 @@
         </p:nvSpPr>
         <p:spPr>
           <a:xfrm>
-            <a:off x="1177200" y="6094800"/>
+            <a:off x="1177200" y="6883200"/>
             <a:ext cx="5810400" cy="370799"/>
           </a:xfrm>
           <a:prstGeom prst="rect">
@@ -4278,7 +4278,7 @@
                 </a:solidFill>
                 <a:latin typeface="Arial"/>
               </a:rPr>
-              <a:t>Justifier une absence sur Pronote</a:t>
+              <a:t>Points de vigilance</a:t>
             </a:r>
           </a:p>
         </p:txBody>
@@ -4291,8 +4291,8 @@
         </p:nvSpPr>
         <p:spPr>
           <a:xfrm>
-            <a:off x="1159200" y="6523200"/>
-            <a:ext cx="5828400" cy="885600"/>
+            <a:off x="1159200" y="7311600"/>
+            <a:ext cx="5828400" cy="881999"/>
           </a:xfrm>
           <a:prstGeom prst="rect">
             <a:avLst/>
@@ -4320,7 +4320,7 @@
                 </a:solidFill>
                 <a:latin typeface="Arial"/>
               </a:rPr>
-              <a:t>→ Ce guide pas à pas vous montrera comment signaler et justifier une absence de votre enfant directement depuis l'application Pronote ou la version web.</a:t>
+              <a:t>→ Quelques erreurs courantes peuvent compliquer votre expérience sur ces plateformes. Voici les réflexes essentiels à adopter dès maintenant.</a:t>
             </a:r>
           </a:p>
           <a:p>
@@ -4339,7 +4339,7 @@
                 </a:solidFill>
                 <a:latin typeface="Arial"/>
               </a:rPr>
-              <a:t>→ Ouvrir l'application ou le site Pronote</a:t>
+              <a:t>→ BON RÉFLEXE</a:t>
             </a:r>
           </a:p>
           <a:p>
@@ -4358,7 +4358,7 @@
                 </a:solidFill>
                 <a:latin typeface="Arial"/>
               </a:rPr>
-              <a:t>→ Lancez l'application mobile Pronote sur votre smartphone ou rendez-vous sur le site web depuis votre navigateur.</a:t>
+              <a:t>→ Partager ses identifiants Educonnect avec quelqu'un</a:t>
             </a:r>
           </a:p>
           <a:p>
@@ -4377,7 +4377,7 @@
                 </a:solidFill>
                 <a:latin typeface="Arial"/>
               </a:rPr>
-              <a:t>→ Accéder à la section "Absences"</a:t>
+              <a:t>→ Noter ses identifiants dans un endroit sûr (pas un post-it visible !)</a:t>
             </a:r>
           </a:p>
         </p:txBody>
@@ -4390,7 +4390,7 @@
         </p:nvSpPr>
         <p:spPr>
           <a:xfrm>
-            <a:off x="532800" y="7639200"/>
+            <a:off x="532800" y="8366399"/>
             <a:ext cx="6490800" cy="658800"/>
           </a:xfrm>
           <a:prstGeom prst="rect">
@@ -4433,7 +4433,7 @@
         </p:nvSpPr>
         <p:spPr>
           <a:xfrm>
-            <a:off x="1540799" y="7675200"/>
+            <a:off x="1540799" y="8402400"/>
             <a:ext cx="5410800" cy="604800"/>
           </a:xfrm>
           <a:prstGeom prst="rect">
@@ -4462,7 +4462,7 @@
                 </a:solidFill>
                 <a:latin typeface="Arial"/>
               </a:rPr>
-              <a:t>→ Suite en page 2 : Les dates clés de Parcoursup 2025 | Points de vigilance</a:t>
+              <a:t>→ Suite en page 2 : Justifier une absence sur Pronote | Les dates clés de Parcoursup 2025</a:t>
             </a:r>
           </a:p>
           <a:p>
@@ -4624,7 +4624,7 @@
         <p:spPr>
           <a:xfrm>
             <a:off x="532800" y="1749600"/>
-            <a:ext cx="6490800" cy="1371600"/>
+            <a:ext cx="6490800" cy="1533600"/>
           </a:xfrm>
           <a:prstGeom prst="rect">
             <a:avLst/>
@@ -4665,7 +4665,7 @@
         <p:spPr>
           <a:xfrm>
             <a:off x="532800" y="1749600"/>
-            <a:ext cx="572400" cy="1371600"/>
+            <a:ext cx="572400" cy="1533600"/>
           </a:xfrm>
           <a:prstGeom prst="rect">
             <a:avLst/>
@@ -4817,7 +4817,7 @@
                 </a:solidFill>
                 <a:latin typeface="Arial"/>
               </a:rPr>
-              <a:t>Les dates clés de Parcoursup 2025</a:t>
+              <a:t>Justifier une absence sur Pronote</a:t>
             </a:r>
           </a:p>
         </p:txBody>
@@ -4831,7 +4831,7 @@
         <p:spPr>
           <a:xfrm>
             <a:off x="1159200" y="2214000"/>
-            <a:ext cx="5828400" cy="885600"/>
+            <a:ext cx="5828400" cy="1033199"/>
           </a:xfrm>
           <a:prstGeom prst="rect">
             <a:avLst/>
@@ -4859,7 +4859,7 @@
                 </a:solidFill>
                 <a:latin typeface="Arial"/>
               </a:rPr>
-              <a:t>→ Anticipez chaque étape de l'orientation post-bac avec ce calendrier officiel des moments cruciaux.</a:t>
+              <a:t>→ Ce guide pas à pas vous montrera comment signaler et justifier une absence de votre enfant directement depuis l'application Pronote ou la version web.</a:t>
             </a:r>
           </a:p>
           <a:p>
@@ -4878,7 +4878,7 @@
                 </a:solidFill>
                 <a:latin typeface="Arial"/>
               </a:rPr>
-              <a:t>→ Inscription et création du dossier</a:t>
+              <a:t>→ Ouvrir l'application ou le site Pronote</a:t>
             </a:r>
           </a:p>
           <a:p>
@@ -4897,7 +4897,7 @@
                 </a:solidFill>
                 <a:latin typeface="Arial"/>
               </a:rPr>
-              <a:t>→ Mi-janvier à début mars : Création de votre dossier et saisie des informations personnelles.</a:t>
+              <a:t>→ Lancez l'application mobile Pronote sur votre smartphone ou rendez-vous sur le site web depuis votre navigateur.</a:t>
             </a:r>
           </a:p>
           <a:p>
@@ -4916,7 +4916,7 @@
                 </a:solidFill>
                 <a:latin typeface="Arial"/>
               </a:rPr>
-              <a:t>→ Formulation des vœux</a:t>
+              <a:t>→ Accéder à la section "Absences"</a:t>
             </a:r>
           </a:p>
         </p:txBody>
@@ -4929,8 +4929,8 @@
         </p:nvSpPr>
         <p:spPr>
           <a:xfrm>
-            <a:off x="532800" y="3186000"/>
-            <a:ext cx="6490800" cy="1371600"/>
+            <a:off x="532800" y="3348000"/>
+            <a:ext cx="6490800" cy="1533600"/>
           </a:xfrm>
           <a:prstGeom prst="rect">
             <a:avLst/>
@@ -4970,8 +4970,8 @@
         </p:nvSpPr>
         <p:spPr>
           <a:xfrm>
-            <a:off x="532800" y="3186000"/>
-            <a:ext cx="572400" cy="1371600"/>
+            <a:off x="532800" y="3348000"/>
+            <a:ext cx="572400" cy="1533600"/>
           </a:xfrm>
           <a:prstGeom prst="rect">
             <a:avLst/>
@@ -5011,7 +5011,7 @@
         </p:nvSpPr>
         <p:spPr>
           <a:xfrm>
-            <a:off x="1206000" y="3607200"/>
+            <a:off x="1206000" y="3769200"/>
             <a:ext cx="5752800" cy="7200"/>
           </a:xfrm>
           <a:prstGeom prst="rect">
@@ -5052,7 +5052,7 @@
         </p:nvSpPr>
         <p:spPr>
           <a:xfrm>
-            <a:off x="532800" y="3252600"/>
+            <a:off x="532800" y="3414600"/>
             <a:ext cx="572400" cy="288000"/>
           </a:xfrm>
           <a:prstGeom prst="rect">
@@ -5094,7 +5094,7 @@
         </p:nvSpPr>
         <p:spPr>
           <a:xfrm>
-            <a:off x="1177200" y="3221999"/>
+            <a:off x="1177200" y="3384000"/>
             <a:ext cx="5810400" cy="370799"/>
           </a:xfrm>
           <a:prstGeom prst="rect">
@@ -5123,7 +5123,7 @@
                 </a:solidFill>
                 <a:latin typeface="Arial"/>
               </a:rPr>
-              <a:t>Points de vigilance</a:t>
+              <a:t>Les dates clés de Parcoursup 2025</a:t>
             </a:r>
           </a:p>
         </p:txBody>
@@ -5136,8 +5136,8 @@
         </p:nvSpPr>
         <p:spPr>
           <a:xfrm>
-            <a:off x="1159200" y="3650399"/>
-            <a:ext cx="5828400" cy="885600"/>
+            <a:off x="1159200" y="3812400"/>
+            <a:ext cx="5828400" cy="1033199"/>
           </a:xfrm>
           <a:prstGeom prst="rect">
             <a:avLst/>
@@ -5165,7 +5165,7 @@
                 </a:solidFill>
                 <a:latin typeface="Arial"/>
               </a:rPr>
-              <a:t>→ Quelques erreurs courantes peuvent compliquer votre expérience sur ces plateformes. Voici les réflexes essentiels à adopter dès maintenant.</a:t>
+              <a:t>→ Anticipez chaque étape de l'orientation post-bac avec ce calendrier officiel des moments cruciaux.</a:t>
             </a:r>
           </a:p>
           <a:p>
@@ -5184,7 +5184,7 @@
                 </a:solidFill>
                 <a:latin typeface="Arial"/>
               </a:rPr>
-              <a:t>→ BON RÉFLEXE</a:t>
+              <a:t>→ Inscription et création du dossier</a:t>
             </a:r>
           </a:p>
           <a:p>
@@ -5203,7 +5203,7 @@
                 </a:solidFill>
                 <a:latin typeface="Arial"/>
               </a:rPr>
-              <a:t>→ Partager ses identifiants Educonnect avec quelqu'un</a:t>
+              <a:t>→ Mi-janvier à début mars : Création de votre dossier et saisie des informations personnelles.</a:t>
             </a:r>
           </a:p>
           <a:p>
@@ -5222,7 +5222,7 @@
                 </a:solidFill>
                 <a:latin typeface="Arial"/>
               </a:rPr>
-              <a:t>→ Noter ses identifiants dans un endroit sûr (pas un post-it visible !)</a:t>
+              <a:t>→ Formulation des vœux</a:t>
             </a:r>
           </a:p>
         </p:txBody>

--- a/assets/memos/B7-memo.pptx
+++ b/assets/memos/B7-memo.pptx
@@ -3097,9 +3097,35 @@
         <p:nvPr/>
       </p:nvGrpSpPr>
       <p:grpSpPr/>
-      <p:sp>
-        <p:nvSpPr>
-          <p:cNvPr id="2" name="TextBox 1"/>
+      <p:pic>
+        <p:nvPicPr>
+          <p:cNvPr id="2" name="Picture 1" descr="bg-p1.png"/>
+          <p:cNvPicPr>
+            <a:picLocks noChangeAspect="1"/>
+          </p:cNvPicPr>
+          <p:nvPr/>
+        </p:nvPicPr>
+        <p:blipFill>
+          <a:blip r:embed="rId2">
+            <a:alphaModFix amt="80000"/>
+          </a:blip>
+          <a:stretch>
+            <a:fillRect/>
+          </a:stretch>
+        </p:blipFill>
+        <p:spPr>
+          <a:xfrm>
+            <a:off x="0" y="0"/>
+            <a:ext cx="7556399" cy="10692000"/>
+          </a:xfrm>
+          <a:prstGeom prst="rect">
+            <a:avLst/>
+          </a:prstGeom>
+        </p:spPr>
+      </p:pic>
+      <p:sp>
+        <p:nvSpPr>
+          <p:cNvPr id="3" name="TextBox 2"/>
           <p:cNvSpPr txBox="1"/>
           <p:nvPr/>
         </p:nvSpPr>
@@ -3160,7 +3186,7 @@
       </p:sp>
       <p:sp>
         <p:nvSpPr>
-          <p:cNvPr id="3" name="Rectangle 2"/>
+          <p:cNvPr id="4" name="Rectangle 3"/>
           <p:cNvSpPr/>
           <p:nvPr/>
         </p:nvSpPr>
@@ -3201,7 +3227,7 @@
       </p:sp>
       <p:sp>
         <p:nvSpPr>
-          <p:cNvPr id="4" name="Rectangle 3"/>
+          <p:cNvPr id="5" name="Rectangle 4"/>
           <p:cNvSpPr/>
           <p:nvPr/>
         </p:nvSpPr>
@@ -3242,7 +3268,7 @@
       </p:sp>
       <p:sp>
         <p:nvSpPr>
-          <p:cNvPr id="5" name="Rectangle 4"/>
+          <p:cNvPr id="6" name="Rectangle 5"/>
           <p:cNvSpPr/>
           <p:nvPr/>
         </p:nvSpPr>
@@ -3283,7 +3309,7 @@
       </p:sp>
       <p:sp>
         <p:nvSpPr>
-          <p:cNvPr id="6" name="TextBox 5"/>
+          <p:cNvPr id="7" name="TextBox 6"/>
           <p:cNvSpPr txBox="1"/>
           <p:nvPr/>
         </p:nvSpPr>
@@ -3325,7 +3351,7 @@
       </p:sp>
       <p:sp>
         <p:nvSpPr>
-          <p:cNvPr id="7" name="TextBox 6"/>
+          <p:cNvPr id="8" name="TextBox 7"/>
           <p:cNvSpPr txBox="1"/>
           <p:nvPr/>
         </p:nvSpPr>
@@ -3367,7 +3393,7 @@
       </p:sp>
       <p:sp>
         <p:nvSpPr>
-          <p:cNvPr id="8" name="TextBox 7"/>
+          <p:cNvPr id="9" name="TextBox 8"/>
           <p:cNvSpPr txBox="1"/>
           <p:nvPr/>
         </p:nvSpPr>
@@ -3466,7 +3492,7 @@
       </p:sp>
       <p:sp>
         <p:nvSpPr>
-          <p:cNvPr id="9" name="Rectangle 8"/>
+          <p:cNvPr id="10" name="Rectangle 9"/>
           <p:cNvSpPr/>
           <p:nvPr/>
         </p:nvSpPr>
@@ -3507,7 +3533,7 @@
       </p:sp>
       <p:sp>
         <p:nvSpPr>
-          <p:cNvPr id="10" name="Rectangle 9"/>
+          <p:cNvPr id="11" name="Rectangle 10"/>
           <p:cNvSpPr/>
           <p:nvPr/>
         </p:nvSpPr>
@@ -3548,7 +3574,7 @@
       </p:sp>
       <p:sp>
         <p:nvSpPr>
-          <p:cNvPr id="11" name="Rectangle 10"/>
+          <p:cNvPr id="12" name="Rectangle 11"/>
           <p:cNvSpPr/>
           <p:nvPr/>
         </p:nvSpPr>
@@ -3589,7 +3615,7 @@
       </p:sp>
       <p:sp>
         <p:nvSpPr>
-          <p:cNvPr id="12" name="TextBox 11"/>
+          <p:cNvPr id="13" name="TextBox 12"/>
           <p:cNvSpPr txBox="1"/>
           <p:nvPr/>
         </p:nvSpPr>
@@ -3631,7 +3657,7 @@
       </p:sp>
       <p:sp>
         <p:nvSpPr>
-          <p:cNvPr id="13" name="TextBox 12"/>
+          <p:cNvPr id="14" name="TextBox 13"/>
           <p:cNvSpPr txBox="1"/>
           <p:nvPr/>
         </p:nvSpPr>
@@ -3673,7 +3699,7 @@
       </p:sp>
       <p:sp>
         <p:nvSpPr>
-          <p:cNvPr id="14" name="TextBox 13"/>
+          <p:cNvPr id="15" name="TextBox 14"/>
           <p:cNvSpPr txBox="1"/>
           <p:nvPr/>
         </p:nvSpPr>
@@ -3772,7 +3798,7 @@
       </p:sp>
       <p:sp>
         <p:nvSpPr>
-          <p:cNvPr id="15" name="Rectangle 14"/>
+          <p:cNvPr id="16" name="Rectangle 15"/>
           <p:cNvSpPr/>
           <p:nvPr/>
         </p:nvSpPr>
@@ -3813,7 +3839,7 @@
       </p:sp>
       <p:sp>
         <p:nvSpPr>
-          <p:cNvPr id="16" name="Rectangle 15"/>
+          <p:cNvPr id="17" name="Rectangle 16"/>
           <p:cNvSpPr/>
           <p:nvPr/>
         </p:nvSpPr>
@@ -3854,7 +3880,7 @@
       </p:sp>
       <p:sp>
         <p:nvSpPr>
-          <p:cNvPr id="17" name="Rectangle 16"/>
+          <p:cNvPr id="18" name="Rectangle 17"/>
           <p:cNvSpPr/>
           <p:nvPr/>
         </p:nvSpPr>
@@ -3895,7 +3921,7 @@
       </p:sp>
       <p:sp>
         <p:nvSpPr>
-          <p:cNvPr id="18" name="TextBox 17"/>
+          <p:cNvPr id="19" name="TextBox 18"/>
           <p:cNvSpPr txBox="1"/>
           <p:nvPr/>
         </p:nvSpPr>
@@ -3937,7 +3963,7 @@
       </p:sp>
       <p:sp>
         <p:nvSpPr>
-          <p:cNvPr id="19" name="TextBox 18"/>
+          <p:cNvPr id="20" name="TextBox 19"/>
           <p:cNvSpPr txBox="1"/>
           <p:nvPr/>
         </p:nvSpPr>
@@ -3979,7 +4005,7 @@
       </p:sp>
       <p:sp>
         <p:nvSpPr>
-          <p:cNvPr id="20" name="TextBox 19"/>
+          <p:cNvPr id="21" name="TextBox 20"/>
           <p:cNvSpPr txBox="1"/>
           <p:nvPr/>
         </p:nvSpPr>
@@ -4078,7 +4104,7 @@
       </p:sp>
       <p:sp>
         <p:nvSpPr>
-          <p:cNvPr id="21" name="Rectangle 20"/>
+          <p:cNvPr id="22" name="Rectangle 21"/>
           <p:cNvSpPr/>
           <p:nvPr/>
         </p:nvSpPr>
@@ -4119,7 +4145,7 @@
       </p:sp>
       <p:sp>
         <p:nvSpPr>
-          <p:cNvPr id="22" name="Rectangle 21"/>
+          <p:cNvPr id="23" name="Rectangle 22"/>
           <p:cNvSpPr/>
           <p:nvPr/>
         </p:nvSpPr>
@@ -4160,7 +4186,7 @@
       </p:sp>
       <p:sp>
         <p:nvSpPr>
-          <p:cNvPr id="23" name="Rectangle 22"/>
+          <p:cNvPr id="24" name="Rectangle 23"/>
           <p:cNvSpPr/>
           <p:nvPr/>
         </p:nvSpPr>
@@ -4201,7 +4227,7 @@
       </p:sp>
       <p:sp>
         <p:nvSpPr>
-          <p:cNvPr id="24" name="TextBox 23"/>
+          <p:cNvPr id="25" name="TextBox 24"/>
           <p:cNvSpPr txBox="1"/>
           <p:nvPr/>
         </p:nvSpPr>
@@ -4243,7 +4269,7 @@
       </p:sp>
       <p:sp>
         <p:nvSpPr>
-          <p:cNvPr id="25" name="TextBox 24"/>
+          <p:cNvPr id="26" name="TextBox 25"/>
           <p:cNvSpPr txBox="1"/>
           <p:nvPr/>
         </p:nvSpPr>
@@ -4285,7 +4311,7 @@
       </p:sp>
       <p:sp>
         <p:nvSpPr>
-          <p:cNvPr id="26" name="TextBox 25"/>
+          <p:cNvPr id="27" name="TextBox 26"/>
           <p:cNvSpPr txBox="1"/>
           <p:nvPr/>
         </p:nvSpPr>
@@ -4384,7 +4410,7 @@
       </p:sp>
       <p:sp>
         <p:nvSpPr>
-          <p:cNvPr id="27" name="Rectangle 26"/>
+          <p:cNvPr id="28" name="Rectangle 27"/>
           <p:cNvSpPr/>
           <p:nvPr/>
         </p:nvSpPr>
@@ -4427,7 +4453,7 @@
       </p:sp>
       <p:sp>
         <p:nvSpPr>
-          <p:cNvPr id="28" name="TextBox 27"/>
+          <p:cNvPr id="29" name="TextBox 28"/>
           <p:cNvSpPr txBox="1"/>
           <p:nvPr/>
         </p:nvSpPr>
@@ -4488,7 +4514,7 @@
       </p:sp>
       <p:sp>
         <p:nvSpPr>
-          <p:cNvPr id="29" name="TextBox 28"/>
+          <p:cNvPr id="30" name="TextBox 29"/>
           <p:cNvSpPr txBox="1"/>
           <p:nvPr/>
         </p:nvSpPr>
@@ -4554,9 +4580,35 @@
         <p:nvPr/>
       </p:nvGrpSpPr>
       <p:grpSpPr/>
-      <p:sp>
-        <p:nvSpPr>
-          <p:cNvPr id="2" name="TextBox 1"/>
+      <p:pic>
+        <p:nvPicPr>
+          <p:cNvPr id="2" name="Picture 1" descr="bg-p2.png"/>
+          <p:cNvPicPr>
+            <a:picLocks noChangeAspect="1"/>
+          </p:cNvPicPr>
+          <p:nvPr/>
+        </p:nvPicPr>
+        <p:blipFill>
+          <a:blip r:embed="rId2">
+            <a:alphaModFix amt="80000"/>
+          </a:blip>
+          <a:stretch>
+            <a:fillRect/>
+          </a:stretch>
+        </p:blipFill>
+        <p:spPr>
+          <a:xfrm>
+            <a:off x="0" y="0"/>
+            <a:ext cx="7556399" cy="10692000"/>
+          </a:xfrm>
+          <a:prstGeom prst="rect">
+            <a:avLst/>
+          </a:prstGeom>
+        </p:spPr>
+      </p:pic>
+      <p:sp>
+        <p:nvSpPr>
+          <p:cNvPr id="3" name="TextBox 2"/>
           <p:cNvSpPr txBox="1"/>
           <p:nvPr/>
         </p:nvSpPr>
@@ -4617,7 +4669,7 @@
       </p:sp>
       <p:sp>
         <p:nvSpPr>
-          <p:cNvPr id="3" name="Rectangle 2"/>
+          <p:cNvPr id="4" name="Rectangle 3"/>
           <p:cNvSpPr/>
           <p:nvPr/>
         </p:nvSpPr>
@@ -4658,7 +4710,7 @@
       </p:sp>
       <p:sp>
         <p:nvSpPr>
-          <p:cNvPr id="4" name="Rectangle 3"/>
+          <p:cNvPr id="5" name="Rectangle 4"/>
           <p:cNvSpPr/>
           <p:nvPr/>
         </p:nvSpPr>
@@ -4699,7 +4751,7 @@
       </p:sp>
       <p:sp>
         <p:nvSpPr>
-          <p:cNvPr id="5" name="Rectangle 4"/>
+          <p:cNvPr id="6" name="Rectangle 5"/>
           <p:cNvSpPr/>
           <p:nvPr/>
         </p:nvSpPr>
@@ -4740,7 +4792,7 @@
       </p:sp>
       <p:sp>
         <p:nvSpPr>
-          <p:cNvPr id="6" name="TextBox 5"/>
+          <p:cNvPr id="7" name="TextBox 6"/>
           <p:cNvSpPr txBox="1"/>
           <p:nvPr/>
         </p:nvSpPr>
@@ -4782,7 +4834,7 @@
       </p:sp>
       <p:sp>
         <p:nvSpPr>
-          <p:cNvPr id="7" name="TextBox 6"/>
+          <p:cNvPr id="8" name="TextBox 7"/>
           <p:cNvSpPr txBox="1"/>
           <p:nvPr/>
         </p:nvSpPr>
@@ -4824,7 +4876,7 @@
       </p:sp>
       <p:sp>
         <p:nvSpPr>
-          <p:cNvPr id="8" name="TextBox 7"/>
+          <p:cNvPr id="9" name="TextBox 8"/>
           <p:cNvSpPr txBox="1"/>
           <p:nvPr/>
         </p:nvSpPr>
@@ -4923,7 +4975,7 @@
       </p:sp>
       <p:sp>
         <p:nvSpPr>
-          <p:cNvPr id="9" name="Rectangle 8"/>
+          <p:cNvPr id="10" name="Rectangle 9"/>
           <p:cNvSpPr/>
           <p:nvPr/>
         </p:nvSpPr>
@@ -4964,7 +5016,7 @@
       </p:sp>
       <p:sp>
         <p:nvSpPr>
-          <p:cNvPr id="10" name="Rectangle 9"/>
+          <p:cNvPr id="11" name="Rectangle 10"/>
           <p:cNvSpPr/>
           <p:nvPr/>
         </p:nvSpPr>
@@ -5005,7 +5057,7 @@
       </p:sp>
       <p:sp>
         <p:nvSpPr>
-          <p:cNvPr id="11" name="Rectangle 10"/>
+          <p:cNvPr id="12" name="Rectangle 11"/>
           <p:cNvSpPr/>
           <p:nvPr/>
         </p:nvSpPr>
@@ -5046,7 +5098,7 @@
       </p:sp>
       <p:sp>
         <p:nvSpPr>
-          <p:cNvPr id="12" name="TextBox 11"/>
+          <p:cNvPr id="13" name="TextBox 12"/>
           <p:cNvSpPr txBox="1"/>
           <p:nvPr/>
         </p:nvSpPr>
@@ -5088,7 +5140,7 @@
       </p:sp>
       <p:sp>
         <p:nvSpPr>
-          <p:cNvPr id="13" name="TextBox 12"/>
+          <p:cNvPr id="14" name="TextBox 13"/>
           <p:cNvSpPr txBox="1"/>
           <p:nvPr/>
         </p:nvSpPr>
@@ -5130,7 +5182,7 @@
       </p:sp>
       <p:sp>
         <p:nvSpPr>
-          <p:cNvPr id="14" name="TextBox 13"/>
+          <p:cNvPr id="15" name="TextBox 14"/>
           <p:cNvSpPr txBox="1"/>
           <p:nvPr/>
         </p:nvSpPr>
@@ -5229,7 +5281,7 @@
       </p:sp>
       <p:sp>
         <p:nvSpPr>
-          <p:cNvPr id="15" name="Rectangle 14"/>
+          <p:cNvPr id="16" name="Rectangle 15"/>
           <p:cNvSpPr/>
           <p:nvPr/>
         </p:nvSpPr>
@@ -5272,7 +5324,7 @@
       </p:sp>
       <p:sp>
         <p:nvSpPr>
-          <p:cNvPr id="16" name="Rectangle 15"/>
+          <p:cNvPr id="17" name="Rectangle 16"/>
           <p:cNvSpPr/>
           <p:nvPr/>
         </p:nvSpPr>
@@ -5313,7 +5365,7 @@
       </p:sp>
       <p:sp>
         <p:nvSpPr>
-          <p:cNvPr id="17" name="TextBox 16"/>
+          <p:cNvPr id="18" name="TextBox 17"/>
           <p:cNvSpPr txBox="1"/>
           <p:nvPr/>
         </p:nvSpPr>
@@ -5431,7 +5483,7 @@
       </p:sp>
       <p:sp>
         <p:nvSpPr>
-          <p:cNvPr id="18" name="TextBox 17"/>
+          <p:cNvPr id="19" name="TextBox 18"/>
           <p:cNvSpPr txBox="1"/>
           <p:nvPr/>
         </p:nvSpPr>

--- a/assets/memos/B7-memo.pptx
+++ b/assets/memos/B7-memo.pptx
@@ -3084,9 +3084,12 @@
   <p:cSld>
     <p:bg>
       <p:bgPr>
-        <a:solidFill>
-          <a:srgbClr val="FFFFFF"/>
-        </a:solidFill>
+        <a:blipFill>
+          <a:blip r:embed="rId2"/>
+          <a:stretch>
+            <a:fillRect/>
+          </a:stretch>
+        </a:blipFill>
         <a:effectLst/>
       </p:bgPr>
     </p:bg>
@@ -3097,35 +3100,9 @@
         <p:nvPr/>
       </p:nvGrpSpPr>
       <p:grpSpPr/>
-      <p:pic>
-        <p:nvPicPr>
-          <p:cNvPr id="2" name="Picture 1" descr="bg-p1.png"/>
-          <p:cNvPicPr>
-            <a:picLocks noChangeAspect="1"/>
-          </p:cNvPicPr>
-          <p:nvPr/>
-        </p:nvPicPr>
-        <p:blipFill>
-          <a:blip r:embed="rId2">
-            <a:alphaModFix amt="80000"/>
-          </a:blip>
-          <a:stretch>
-            <a:fillRect/>
-          </a:stretch>
-        </p:blipFill>
-        <p:spPr>
-          <a:xfrm>
-            <a:off x="0" y="0"/>
-            <a:ext cx="7556399" cy="10692000"/>
-          </a:xfrm>
-          <a:prstGeom prst="rect">
-            <a:avLst/>
-          </a:prstGeom>
-        </p:spPr>
-      </p:pic>
-      <p:sp>
-        <p:nvSpPr>
-          <p:cNvPr id="3" name="TextBox 2"/>
+      <p:sp>
+        <p:nvSpPr>
+          <p:cNvPr id="2" name="TextBox 1"/>
           <p:cNvSpPr txBox="1"/>
           <p:nvPr/>
         </p:nvSpPr>
@@ -3186,7 +3163,7 @@
       </p:sp>
       <p:sp>
         <p:nvSpPr>
-          <p:cNvPr id="4" name="Rectangle 3"/>
+          <p:cNvPr id="3" name="Rectangle 2"/>
           <p:cNvSpPr/>
           <p:nvPr/>
         </p:nvSpPr>
@@ -3227,7 +3204,7 @@
       </p:sp>
       <p:sp>
         <p:nvSpPr>
-          <p:cNvPr id="5" name="Rectangle 4"/>
+          <p:cNvPr id="4" name="Rectangle 3"/>
           <p:cNvSpPr/>
           <p:nvPr/>
         </p:nvSpPr>
@@ -3268,7 +3245,7 @@
       </p:sp>
       <p:sp>
         <p:nvSpPr>
-          <p:cNvPr id="6" name="Rectangle 5"/>
+          <p:cNvPr id="5" name="Rectangle 4"/>
           <p:cNvSpPr/>
           <p:nvPr/>
         </p:nvSpPr>
@@ -3309,7 +3286,7 @@
       </p:sp>
       <p:sp>
         <p:nvSpPr>
-          <p:cNvPr id="7" name="TextBox 6"/>
+          <p:cNvPr id="6" name="TextBox 5"/>
           <p:cNvSpPr txBox="1"/>
           <p:nvPr/>
         </p:nvSpPr>
@@ -3351,7 +3328,7 @@
       </p:sp>
       <p:sp>
         <p:nvSpPr>
-          <p:cNvPr id="8" name="TextBox 7"/>
+          <p:cNvPr id="7" name="TextBox 6"/>
           <p:cNvSpPr txBox="1"/>
           <p:nvPr/>
         </p:nvSpPr>
@@ -3393,7 +3370,7 @@
       </p:sp>
       <p:sp>
         <p:nvSpPr>
-          <p:cNvPr id="9" name="TextBox 8"/>
+          <p:cNvPr id="8" name="TextBox 7"/>
           <p:cNvSpPr txBox="1"/>
           <p:nvPr/>
         </p:nvSpPr>
@@ -3492,7 +3469,7 @@
       </p:sp>
       <p:sp>
         <p:nvSpPr>
-          <p:cNvPr id="10" name="Rectangle 9"/>
+          <p:cNvPr id="9" name="Rectangle 8"/>
           <p:cNvSpPr/>
           <p:nvPr/>
         </p:nvSpPr>
@@ -3533,7 +3510,7 @@
       </p:sp>
       <p:sp>
         <p:nvSpPr>
-          <p:cNvPr id="11" name="Rectangle 10"/>
+          <p:cNvPr id="10" name="Rectangle 9"/>
           <p:cNvSpPr/>
           <p:nvPr/>
         </p:nvSpPr>
@@ -3574,7 +3551,7 @@
       </p:sp>
       <p:sp>
         <p:nvSpPr>
-          <p:cNvPr id="12" name="Rectangle 11"/>
+          <p:cNvPr id="11" name="Rectangle 10"/>
           <p:cNvSpPr/>
           <p:nvPr/>
         </p:nvSpPr>
@@ -3615,7 +3592,7 @@
       </p:sp>
       <p:sp>
         <p:nvSpPr>
-          <p:cNvPr id="13" name="TextBox 12"/>
+          <p:cNvPr id="12" name="TextBox 11"/>
           <p:cNvSpPr txBox="1"/>
           <p:nvPr/>
         </p:nvSpPr>
@@ -3657,7 +3634,7 @@
       </p:sp>
       <p:sp>
         <p:nvSpPr>
-          <p:cNvPr id="14" name="TextBox 13"/>
+          <p:cNvPr id="13" name="TextBox 12"/>
           <p:cNvSpPr txBox="1"/>
           <p:nvPr/>
         </p:nvSpPr>
@@ -3699,7 +3676,7 @@
       </p:sp>
       <p:sp>
         <p:nvSpPr>
-          <p:cNvPr id="15" name="TextBox 14"/>
+          <p:cNvPr id="14" name="TextBox 13"/>
           <p:cNvSpPr txBox="1"/>
           <p:nvPr/>
         </p:nvSpPr>
@@ -3798,7 +3775,7 @@
       </p:sp>
       <p:sp>
         <p:nvSpPr>
-          <p:cNvPr id="16" name="Rectangle 15"/>
+          <p:cNvPr id="15" name="Rectangle 14"/>
           <p:cNvSpPr/>
           <p:nvPr/>
         </p:nvSpPr>
@@ -3839,7 +3816,7 @@
       </p:sp>
       <p:sp>
         <p:nvSpPr>
-          <p:cNvPr id="17" name="Rectangle 16"/>
+          <p:cNvPr id="16" name="Rectangle 15"/>
           <p:cNvSpPr/>
           <p:nvPr/>
         </p:nvSpPr>
@@ -3880,7 +3857,7 @@
       </p:sp>
       <p:sp>
         <p:nvSpPr>
-          <p:cNvPr id="18" name="Rectangle 17"/>
+          <p:cNvPr id="17" name="Rectangle 16"/>
           <p:cNvSpPr/>
           <p:nvPr/>
         </p:nvSpPr>
@@ -3921,7 +3898,7 @@
       </p:sp>
       <p:sp>
         <p:nvSpPr>
-          <p:cNvPr id="19" name="TextBox 18"/>
+          <p:cNvPr id="18" name="TextBox 17"/>
           <p:cNvSpPr txBox="1"/>
           <p:nvPr/>
         </p:nvSpPr>
@@ -3963,7 +3940,7 @@
       </p:sp>
       <p:sp>
         <p:nvSpPr>
-          <p:cNvPr id="20" name="TextBox 19"/>
+          <p:cNvPr id="19" name="TextBox 18"/>
           <p:cNvSpPr txBox="1"/>
           <p:nvPr/>
         </p:nvSpPr>
@@ -4005,7 +3982,7 @@
       </p:sp>
       <p:sp>
         <p:nvSpPr>
-          <p:cNvPr id="21" name="TextBox 20"/>
+          <p:cNvPr id="20" name="TextBox 19"/>
           <p:cNvSpPr txBox="1"/>
           <p:nvPr/>
         </p:nvSpPr>
@@ -4104,7 +4081,7 @@
       </p:sp>
       <p:sp>
         <p:nvSpPr>
-          <p:cNvPr id="22" name="Rectangle 21"/>
+          <p:cNvPr id="21" name="Rectangle 20"/>
           <p:cNvSpPr/>
           <p:nvPr/>
         </p:nvSpPr>
@@ -4145,7 +4122,7 @@
       </p:sp>
       <p:sp>
         <p:nvSpPr>
-          <p:cNvPr id="23" name="Rectangle 22"/>
+          <p:cNvPr id="22" name="Rectangle 21"/>
           <p:cNvSpPr/>
           <p:nvPr/>
         </p:nvSpPr>
@@ -4186,7 +4163,7 @@
       </p:sp>
       <p:sp>
         <p:nvSpPr>
-          <p:cNvPr id="24" name="Rectangle 23"/>
+          <p:cNvPr id="23" name="Rectangle 22"/>
           <p:cNvSpPr/>
           <p:nvPr/>
         </p:nvSpPr>
@@ -4227,7 +4204,7 @@
       </p:sp>
       <p:sp>
         <p:nvSpPr>
-          <p:cNvPr id="25" name="TextBox 24"/>
+          <p:cNvPr id="24" name="TextBox 23"/>
           <p:cNvSpPr txBox="1"/>
           <p:nvPr/>
         </p:nvSpPr>
@@ -4269,7 +4246,7 @@
       </p:sp>
       <p:sp>
         <p:nvSpPr>
-          <p:cNvPr id="26" name="TextBox 25"/>
+          <p:cNvPr id="25" name="TextBox 24"/>
           <p:cNvSpPr txBox="1"/>
           <p:nvPr/>
         </p:nvSpPr>
@@ -4311,7 +4288,7 @@
       </p:sp>
       <p:sp>
         <p:nvSpPr>
-          <p:cNvPr id="27" name="TextBox 26"/>
+          <p:cNvPr id="26" name="TextBox 25"/>
           <p:cNvSpPr txBox="1"/>
           <p:nvPr/>
         </p:nvSpPr>
@@ -4410,7 +4387,7 @@
       </p:sp>
       <p:sp>
         <p:nvSpPr>
-          <p:cNvPr id="28" name="Rectangle 27"/>
+          <p:cNvPr id="27" name="Rectangle 26"/>
           <p:cNvSpPr/>
           <p:nvPr/>
         </p:nvSpPr>
@@ -4453,7 +4430,7 @@
       </p:sp>
       <p:sp>
         <p:nvSpPr>
-          <p:cNvPr id="29" name="TextBox 28"/>
+          <p:cNvPr id="28" name="TextBox 27"/>
           <p:cNvSpPr txBox="1"/>
           <p:nvPr/>
         </p:nvSpPr>
@@ -4514,7 +4491,7 @@
       </p:sp>
       <p:sp>
         <p:nvSpPr>
-          <p:cNvPr id="30" name="TextBox 29"/>
+          <p:cNvPr id="29" name="TextBox 28"/>
           <p:cNvSpPr txBox="1"/>
           <p:nvPr/>
         </p:nvSpPr>
@@ -4567,9 +4544,12 @@
   <p:cSld>
     <p:bg>
       <p:bgPr>
-        <a:solidFill>
-          <a:srgbClr val="FFFFFF"/>
-        </a:solidFill>
+        <a:blipFill>
+          <a:blip r:embed="rId2"/>
+          <a:stretch>
+            <a:fillRect/>
+          </a:stretch>
+        </a:blipFill>
         <a:effectLst/>
       </p:bgPr>
     </p:bg>
@@ -4580,35 +4560,9 @@
         <p:nvPr/>
       </p:nvGrpSpPr>
       <p:grpSpPr/>
-      <p:pic>
-        <p:nvPicPr>
-          <p:cNvPr id="2" name="Picture 1" descr="bg-p2.png"/>
-          <p:cNvPicPr>
-            <a:picLocks noChangeAspect="1"/>
-          </p:cNvPicPr>
-          <p:nvPr/>
-        </p:nvPicPr>
-        <p:blipFill>
-          <a:blip r:embed="rId2">
-            <a:alphaModFix amt="80000"/>
-          </a:blip>
-          <a:stretch>
-            <a:fillRect/>
-          </a:stretch>
-        </p:blipFill>
-        <p:spPr>
-          <a:xfrm>
-            <a:off x="0" y="0"/>
-            <a:ext cx="7556399" cy="10692000"/>
-          </a:xfrm>
-          <a:prstGeom prst="rect">
-            <a:avLst/>
-          </a:prstGeom>
-        </p:spPr>
-      </p:pic>
-      <p:sp>
-        <p:nvSpPr>
-          <p:cNvPr id="3" name="TextBox 2"/>
+      <p:sp>
+        <p:nvSpPr>
+          <p:cNvPr id="2" name="TextBox 1"/>
           <p:cNvSpPr txBox="1"/>
           <p:nvPr/>
         </p:nvSpPr>
@@ -4669,7 +4623,7 @@
       </p:sp>
       <p:sp>
         <p:nvSpPr>
-          <p:cNvPr id="4" name="Rectangle 3"/>
+          <p:cNvPr id="3" name="Rectangle 2"/>
           <p:cNvSpPr/>
           <p:nvPr/>
         </p:nvSpPr>
@@ -4710,7 +4664,7 @@
       </p:sp>
       <p:sp>
         <p:nvSpPr>
-          <p:cNvPr id="5" name="Rectangle 4"/>
+          <p:cNvPr id="4" name="Rectangle 3"/>
           <p:cNvSpPr/>
           <p:nvPr/>
         </p:nvSpPr>
@@ -4751,7 +4705,7 @@
       </p:sp>
       <p:sp>
         <p:nvSpPr>
-          <p:cNvPr id="6" name="Rectangle 5"/>
+          <p:cNvPr id="5" name="Rectangle 4"/>
           <p:cNvSpPr/>
           <p:nvPr/>
         </p:nvSpPr>
@@ -4792,7 +4746,7 @@
       </p:sp>
       <p:sp>
         <p:nvSpPr>
-          <p:cNvPr id="7" name="TextBox 6"/>
+          <p:cNvPr id="6" name="TextBox 5"/>
           <p:cNvSpPr txBox="1"/>
           <p:nvPr/>
         </p:nvSpPr>
@@ -4834,7 +4788,7 @@
       </p:sp>
       <p:sp>
         <p:nvSpPr>
-          <p:cNvPr id="8" name="TextBox 7"/>
+          <p:cNvPr id="7" name="TextBox 6"/>
           <p:cNvSpPr txBox="1"/>
           <p:nvPr/>
         </p:nvSpPr>
@@ -4876,7 +4830,7 @@
       </p:sp>
       <p:sp>
         <p:nvSpPr>
-          <p:cNvPr id="9" name="TextBox 8"/>
+          <p:cNvPr id="8" name="TextBox 7"/>
           <p:cNvSpPr txBox="1"/>
           <p:nvPr/>
         </p:nvSpPr>
@@ -4975,7 +4929,7 @@
       </p:sp>
       <p:sp>
         <p:nvSpPr>
-          <p:cNvPr id="10" name="Rectangle 9"/>
+          <p:cNvPr id="9" name="Rectangle 8"/>
           <p:cNvSpPr/>
           <p:nvPr/>
         </p:nvSpPr>
@@ -5016,7 +4970,7 @@
       </p:sp>
       <p:sp>
         <p:nvSpPr>
-          <p:cNvPr id="11" name="Rectangle 10"/>
+          <p:cNvPr id="10" name="Rectangle 9"/>
           <p:cNvSpPr/>
           <p:nvPr/>
         </p:nvSpPr>
@@ -5057,7 +5011,7 @@
       </p:sp>
       <p:sp>
         <p:nvSpPr>
-          <p:cNvPr id="12" name="Rectangle 11"/>
+          <p:cNvPr id="11" name="Rectangle 10"/>
           <p:cNvSpPr/>
           <p:nvPr/>
         </p:nvSpPr>
@@ -5098,7 +5052,7 @@
       </p:sp>
       <p:sp>
         <p:nvSpPr>
-          <p:cNvPr id="13" name="TextBox 12"/>
+          <p:cNvPr id="12" name="TextBox 11"/>
           <p:cNvSpPr txBox="1"/>
           <p:nvPr/>
         </p:nvSpPr>
@@ -5140,7 +5094,7 @@
       </p:sp>
       <p:sp>
         <p:nvSpPr>
-          <p:cNvPr id="14" name="TextBox 13"/>
+          <p:cNvPr id="13" name="TextBox 12"/>
           <p:cNvSpPr txBox="1"/>
           <p:nvPr/>
         </p:nvSpPr>
@@ -5182,7 +5136,7 @@
       </p:sp>
       <p:sp>
         <p:nvSpPr>
-          <p:cNvPr id="15" name="TextBox 14"/>
+          <p:cNvPr id="14" name="TextBox 13"/>
           <p:cNvSpPr txBox="1"/>
           <p:nvPr/>
         </p:nvSpPr>
@@ -5281,7 +5235,7 @@
       </p:sp>
       <p:sp>
         <p:nvSpPr>
-          <p:cNvPr id="16" name="Rectangle 15"/>
+          <p:cNvPr id="15" name="Rectangle 14"/>
           <p:cNvSpPr/>
           <p:nvPr/>
         </p:nvSpPr>
@@ -5324,7 +5278,7 @@
       </p:sp>
       <p:sp>
         <p:nvSpPr>
-          <p:cNvPr id="17" name="Rectangle 16"/>
+          <p:cNvPr id="16" name="Rectangle 15"/>
           <p:cNvSpPr/>
           <p:nvPr/>
         </p:nvSpPr>
@@ -5365,7 +5319,7 @@
       </p:sp>
       <p:sp>
         <p:nvSpPr>
-          <p:cNvPr id="18" name="TextBox 17"/>
+          <p:cNvPr id="17" name="TextBox 16"/>
           <p:cNvSpPr txBox="1"/>
           <p:nvPr/>
         </p:nvSpPr>
@@ -5483,7 +5437,7 @@
       </p:sp>
       <p:sp>
         <p:nvSpPr>
-          <p:cNvPr id="19" name="TextBox 18"/>
+          <p:cNvPr id="18" name="TextBox 17"/>
           <p:cNvSpPr txBox="1"/>
           <p:nvPr/>
         </p:nvSpPr>

--- a/assets/memos/B7-memo.pptx
+++ b/assets/memos/B7-memo.pptx
@@ -4074,7 +4074,7 @@
                 </a:solidFill>
                 <a:latin typeface="Arial"/>
               </a:rPr>
-              <a:t>→ Cliquer sur « Mot de passe oublié ? »</a:t>
+              <a:t>→ Cliquer sur</a:t>
             </a:r>
           </a:p>
         </p:txBody>
